--- a/public/materialy/1L/6/Prezentace k hodinám/8. Závěrečný výstup a obhajoba.pptx
+++ b/public/materialy/1L/6/Prezentace k hodinám/8. Závěrečný výstup a obhajoba.pptx
@@ -508,17 +508,66 @@
           <a:lstStyle/>
           <a:p>
             <a:r>
-              <a:t>Cíl hodiny: Student propojí dovednosti z celého bloku do jednoho výstupu, doloží svá rozhodnutí a obhájí je.</a:t>
-            </a:r>
-          </a:p>
-          <a:p>
-            <a:r>
-              <a:t>Soubory: Závěrečný výstup.txt, nástroje z hodin 4, 5 a 7</a:t>
-            </a:r>
-          </a:p>
-          <a:p>
-            <a:r>
-              <a:t>Výstup: Hotový výstup, vyplněný technický list a tři věty obhajoby.</a:t>
+              <a:t>NEŽ ZAZVONÍ</a:t>
+            </a:r>
+          </a:p>
+          <a:p>
+            <a:r>
+              <a:t>Zpřístupni nástroje z hodin 4, 5 a 7 — student si vybere sám podle varianty a nesmí na to narazit až v hodině.</a:t>
+            </a:r>
+          </a:p>
+          <a:p>
+            <a:r>
+              <a:t>Rozdej Závěrečný výstup.txt s rubrikou. Studenti ji musí mít před sebou od první minuty, protože se podle ní bude hodnotit.</a:t>
+            </a:r>
+          </a:p>
+          <a:p/>
+          <a:p>
+            <a:r>
+              <a:t>TOHLE JE JINÁ HODINA NEŽ PŘEDCHOZÍCH SEDM</a:t>
+            </a:r>
+          </a:p>
+          <a:p>
+            <a:r>
+              <a:t>Nic nového se neučí. Ty jsi tu jako konzultant, ne jako vykladač — obcházej a ptej se na důvody, neopravuj výsledky.</a:t>
+            </a:r>
+          </a:p>
+          <a:p>
+            <a:r>
+              <a:t>Počítej s tím, že 45 minut je málo. Když je to jen trochu možné, dej na závěrečný výstup dvě hodiny; obhajoby se pak vejdou v klidu.</a:t>
+            </a:r>
+          </a:p>
+          <a:p/>
+          <a:p>
+            <a:r>
+              <a:t>CÍL HODINY</a:t>
+            </a:r>
+          </a:p>
+          <a:p>
+            <a:r>
+              <a:t>Student propojí dovednosti z celého bloku do jednoho výstupu, doloží svá rozhodnutí a obhájí je.</a:t>
+            </a:r>
+          </a:p>
+          <a:p/>
+          <a:p>
+            <a:r>
+              <a:t>VÝSTUP, KTERÝ VYBÍRÁŠ</a:t>
+            </a:r>
+          </a:p>
+          <a:p>
+            <a:r>
+              <a:t>Hotový výstup, vyplněný technický list a tři věty obhajoby.</a:t>
+            </a:r>
+          </a:p>
+          <a:p/>
+          <a:p>
+            <a:r>
+              <a:t>ROZVRŽENÍ</a:t>
+            </a:r>
+          </a:p>
+          <a:p>
+            <a:r>
+              <a:t>5 min volba a plán · 7 min kritéria · 22 min tvorba · 8 min obhajoby · 3 min shrnutí bloku.</a:t>
             </a:r>
           </a:p>
         </p:txBody>
@@ -591,14 +640,47 @@
               <a:t>Čas: 0–5 minut.</a:t>
             </a:r>
           </a:p>
-          <a:p>
-            <a:r>
-              <a:t>Otázka pro studenty: Co na tvém výstupu pozná někdo, kdo neví nic o tom, jak vznikal?</a:t>
-            </a:r>
-          </a:p>
-          <a:p>
-            <a:r>
-              <a:t>Postup: nech studenty rozhodnout a zapsat důvod dřív, než ukážeš řešení. Neprozrazuj správnou odpověď.</a:t>
+          <a:p/>
+          <a:p>
+            <a:r>
+              <a:t>CO ŘEKNEŠ</a:t>
+            </a:r>
+          </a:p>
+          <a:p>
+            <a:r>
+              <a:t>„Dneska nic nového. Vyberete si jednu ze tří variant a ukážete, co umíte. A než začnete: co na vašem výstupu pozná někdo, kdo neví nic o tom, jak vznikal?“</a:t>
+            </a:r>
+          </a:p>
+          <a:p>
+            <a:r>
+              <a:t>„Napište si plán. Co uděláte, v jakém nástroji a v jakém formátu to uložíte. Tři řádky stačí.“</a:t>
+            </a:r>
+          </a:p>
+          <a:p/>
+          <a:p>
+            <a:r>
+              <a:t>CO DĚLÁŠ</a:t>
+            </a:r>
+          </a:p>
+          <a:p>
+            <a:r>
+              <a:t>Trvej na tom, aby plán vznikl dřív než první klik. Kdo začne dřív, skončí u výstupu bez formátu a bez zdůvodnění.</a:t>
+            </a:r>
+          </a:p>
+          <a:p>
+            <a:r>
+              <a:t>Ať si každý přečte rubriku ještě před začátkem. Většina bodů se ztrácí na technickém listu, ne na vzhledu, a to je potřeba vědět předem.</a:t>
+            </a:r>
+          </a:p>
+          <a:p/>
+          <a:p>
+            <a:r>
+              <a:t>POZOR</a:t>
+            </a:r>
+          </a:p>
+          <a:p>
+            <a:r>
+              <a:t>Nedoporučuj variantu. Volba je součástí hodnocení — ukazuje, jestli student ví, co zvládne.</a:t>
             </a:r>
           </a:p>
         </p:txBody>
@@ -668,22 +750,55 @@
           <a:lstStyle/>
           <a:p>
             <a:r>
-              <a:t>Čas: 5–12 minut.</a:t>
-            </a:r>
-          </a:p>
-          <a:p>
-            <a:r>
-              <a:t>Klíčové pojmy: Volba nástroje · Volba formátu · Doložení</a:t>
-            </a:r>
-          </a:p>
-          <a:p>
-            <a:r>
-              <a:t>Hodnotí se výsledek, postup i zdůvodnění.</a:t>
-            </a:r>
-          </a:p>
-          <a:p>
-            <a:r>
-              <a:t>Postup: vysvětli stručně, ověř porozuměním otázkou, nepřednášej déle než 7 minut.</a:t>
+              <a:t>Čas: 5–12 minut. Spíš připomenutí než výklad.</a:t>
+            </a:r>
+          </a:p>
+          <a:p/>
+          <a:p>
+            <a:r>
+              <a:t>CO ŘEKNEŠ</a:t>
+            </a:r>
+          </a:p>
+          <a:p>
+            <a:r>
+              <a:t>K bodu 01: „Rastr, vektor nebo sazba. Rozhoduje, co je uvnitř. Fotka rastrově, značka vektorově, plakát obojí dohromady — a to je normální kombinace, ne kompromis.“</a:t>
+            </a:r>
+          </a:p>
+          <a:p>
+            <a:r>
+              <a:t>K bodu 02: „Formát a rozlišení podle toho, kde to skončí. Na web něco jiného než do tiskárny. Tohle jsme dělali v hodinách 3 a 4 a teď se to bude počítat.“</a:t>
+            </a:r>
+          </a:p>
+          <a:p>
+            <a:r>
+              <a:t>K bodu 03: „A poslední: ke každému rozhodnutí patří důvod. Nestačí, že to tak je. Musíte umět říct proč.“</a:t>
+            </a:r>
+          </a:p>
+          <a:p>
+            <a:r>
+              <a:t>Závěr: „Hodnotí se výsledek, postup i zdůvodnění. Všechny tři.“</a:t>
+            </a:r>
+          </a:p>
+          <a:p/>
+          <a:p>
+            <a:r>
+              <a:t>CO DĚLÁŠ</a:t>
+            </a:r>
+          </a:p>
+          <a:p>
+            <a:r>
+              <a:t>Projdi rubriku bod po bodu a u každého řekni, jak vypadá plný počet bodů. Pět minut tady ušetří dvacet dohadování při hodnocení.</a:t>
+            </a:r>
+          </a:p>
+          <a:p/>
+          <a:p>
+            <a:r>
+              <a:t>POZOR</a:t>
+            </a:r>
+          </a:p>
+          <a:p>
+            <a:r>
+              <a:t>Nepředváděj nástroje znovu. Kdo je neovládá, doučí se to od spolužáka rychleji než z projekce.</a:t>
             </a:r>
           </a:p>
         </p:txBody>
@@ -753,32 +868,71 @@
           <a:lstStyle/>
           <a:p>
             <a:r>
-              <a:t>Čas: 12–40 minut.</a:t>
-            </a:r>
-          </a:p>
-          <a:p>
-            <a:r>
-              <a:t>Soubory: Závěrečný výstup.txt, nástroje z hodin 4, 5 a 7</a:t>
-            </a:r>
-          </a:p>
-          <a:p>
-            <a:r>
-              <a:t>12–34 min – samostatná práce; procházej a ptej se na důvody voleb.</a:t>
-            </a:r>
-          </a:p>
-          <a:p>
-            <a:r>
-              <a:t>34–42 min – krátké obhajoby, 60 sekund na studenta.</a:t>
-            </a:r>
-          </a:p>
-          <a:p>
-            <a:r>
-              <a:t>42–45 min – závěrečné shrnutí bloku.</a:t>
-            </a:r>
-          </a:p>
-          <a:p>
-            <a:r>
-              <a:t>Výstup: Hotový výstup, vyplněný technický list a tři věty obhajoby.</a:t>
+              <a:t>Čas: 12–40 minut. Nejnabitější část celého bloku, hlídej hodiny.</a:t>
+            </a:r>
+          </a:p>
+          <a:p/>
+          <a:p>
+            <a:r>
+              <a:t>12–34 MIN · SAMOSTATNÁ PRÁCE</a:t>
+            </a:r>
+          </a:p>
+          <a:p>
+            <a:r>
+              <a:t>Obcházej a ptej se na důvody, ne na postup: „Proč PNG a ne JPEG?“ „Proč tenhle rozměr?“ Odpověď „nevím, přišlo mi to“ je signál, že se student má vrátit k technickému listu.</a:t>
+            </a:r>
+          </a:p>
+          <a:p>
+            <a:r>
+              <a:t>Technický list ať vyplňují průběžně, ne na konci. Rozměry a velikosti souborů se na konci hodiny nikomu dohledávat nechce a je to nejčastější ztráta bodů.</a:t>
+            </a:r>
+          </a:p>
+          <a:p>
+            <a:r>
+              <a:t>Ve 30. minutě řekni nahlas: „Za čtyři minuty končí tvorba. Kdo ještě nemá technický list, nechte výstup být a doplňte list.“</a:t>
+            </a:r>
+          </a:p>
+          <a:p/>
+          <a:p>
+            <a:r>
+              <a:t>34–42 MIN · OBHAJOBY</a:t>
+            </a:r>
+          </a:p>
+          <a:p>
+            <a:r>
+              <a:t>Šedesát sekund na studenta a měř to. Tři věty: co jsem zvolil, proč, co bych udělal jinak.</a:t>
+            </a:r>
+          </a:p>
+          <a:p>
+            <a:r>
+              <a:t>Při dvaceti studentech se všichni nevejdou. Vyber osm až deset tak, aby zazněly všechny tři varianty, ostatní odevzdají obhajobu písemně.</a:t>
+            </a:r>
+          </a:p>
+          <a:p>
+            <a:r>
+              <a:t>Neptej se po každé obhajobě třídy na názor, nezbyde čas. Řekni jednu větu ty a jdi dál.</a:t>
+            </a:r>
+          </a:p>
+          <a:p/>
+          <a:p>
+            <a:r>
+              <a:t>42–45 MIN · SHRNUTÍ BLOKU</a:t>
+            </a:r>
+          </a:p>
+          <a:p>
+            <a:r>
+              <a:t>Vrať se k první hodině: „Začínali jsme otázkou, jaký soubor si vyžádáte od grafika na logo na plachtu. Kdo by to dneska zdůvodnil jinak?“</a:t>
+            </a:r>
+          </a:p>
+          <a:p/>
+          <a:p>
+            <a:r>
+              <a:t>VÝSTUP</a:t>
+            </a:r>
+          </a:p>
+          <a:p>
+            <a:r>
+              <a:t>Hotový výstup, vyplněný technický list a tři věty obhajoby.</a:t>
             </a:r>
           </a:p>
         </p:txBody>
@@ -848,27 +1002,40 @@
           <a:lstStyle/>
           <a:p>
             <a:r>
-              <a:t>Průběžná kontrola. Projdi body nahlas, studenti si odškrtávají v sešitu.</a:t>
-            </a:r>
-          </a:p>
-          <a:p>
-            <a:r>
-              <a:t>• Výstup splňuje všechny povinné prvky zadání.</a:t>
-            </a:r>
-          </a:p>
-          <a:p>
-            <a:r>
-              <a:t>• Technický list obsahuje rozměry, formáty i velikosti.</a:t>
-            </a:r>
-          </a:p>
-          <a:p>
-            <a:r>
-              <a:t>• U volby formátu máš uvedený důvod.</a:t>
-            </a:r>
-          </a:p>
-          <a:p>
-            <a:r>
-              <a:t>• Máš připravené tři věty obhajoby.</a:t>
+              <a:t>Průběžná kontrola, zhruba 32. minuta — dřív než v ostatních hodinách, ať zbude čas na obhajoby.</a:t>
+            </a:r>
+          </a:p>
+          <a:p/>
+          <a:p>
+            <a:r>
+              <a:t>CO ŘEKNEŠ</a:t>
+            </a:r>
+          </a:p>
+          <a:p>
+            <a:r>
+              <a:t>„Než odevzdáte, projedeme čtyři věci. Odškrtávejte si je.“ Čti body nahlas a mezi nimi nech pauzu.</a:t>
+            </a:r>
+          </a:p>
+          <a:p/>
+          <a:p>
+            <a:r>
+              <a:t>CO DĚLÁŠ</a:t>
+            </a:r>
+          </a:p>
+          <a:p>
+            <a:r>
+              <a:t>Druhý a třetí bod jsou ty, kde se ztrácí nejvíc bodů. Řekni to nahlas — je fér, aby to věděli, než odevzdají.</a:t>
+            </a:r>
+          </a:p>
+          <a:p/>
+          <a:p>
+            <a:r>
+              <a:t>POZOR</a:t>
+            </a:r>
+          </a:p>
+          <a:p>
+            <a:r>
+              <a:t>Není to známkování, je to poslední šance práci dodělat.</a:t>
             </a:r>
           </a:p>
         </p:txBody>
@@ -938,32 +1105,60 @@
           <a:lstStyle/>
           <a:p>
             <a:r>
-              <a:t>Společný rozbor – očekávané závěry:</a:t>
-            </a:r>
-          </a:p>
-          <a:p>
-            <a:r>
-              <a:t>Formát a účel: Volba formátu vychází z toho, kde bude výstup použit.</a:t>
-            </a:r>
-          </a:p>
-          <a:p>
-            <a:r>
-              <a:t>Rastr a vektor: Značka vektorově, fotografie rastrově; kombinace je běžná.</a:t>
-            </a:r>
-          </a:p>
-          <a:p>
-            <a:r>
-              <a:t>Poctivost dat: Pokud výstup obsahuje čísla, patří k nim zdroj a omezení.</a:t>
-            </a:r>
-          </a:p>
-          <a:p>
-            <a:r>
-              <a:t>Doložení postupu: Schopnost zdůvodnit volbu je stejně důležitá jako výsledek.</a:t>
-            </a:r>
-          </a:p>
-          <a:p>
-            <a:r>
-              <a:t>Hodnoť postup a zdůvodnění, ne shodu s jednou formulací.</a:t>
+              <a:t>Společný rozbor, 42–45 minut. Zároveň závěr celého osmihodinového bloku.</a:t>
+            </a:r>
+          </a:p>
+          <a:p/>
+          <a:p>
+            <a:r>
+              <a:t>CO ŘEKNEŠ</a:t>
+            </a:r>
+          </a:p>
+          <a:p>
+            <a:r>
+              <a:t>„Osm hodin zpátky jsme začali otázkou, jaký soubor si vyžádáte od grafika na logo, které jde na vizitku i na plachtu. Kdo by to dneska zdůvodnil jinak než tehdy?“</a:t>
+            </a:r>
+          </a:p>
+          <a:p>
+            <a:r>
+              <a:t>Pak nech studenty vyslovit čtyři závěry ze snímku a doplň jen to, co nezazní.</a:t>
+            </a:r>
+          </a:p>
+          <a:p/>
+          <a:p>
+            <a:r>
+              <a:t>OČEKÁVANÉ ZÁVĚRY</a:t>
+            </a:r>
+          </a:p>
+          <a:p>
+            <a:r>
+              <a:t>Formát a účel: volba formátu vychází z toho, kde bude výstup použit.</a:t>
+            </a:r>
+          </a:p>
+          <a:p>
+            <a:r>
+              <a:t>Rastr a vektor: značka vektorově, fotografie rastrově, kombinace je běžná.</a:t>
+            </a:r>
+          </a:p>
+          <a:p>
+            <a:r>
+              <a:t>Poctivost dat: pokud výstup obsahuje čísla, patří k nim zdroj a omezení.</a:t>
+            </a:r>
+          </a:p>
+          <a:p>
+            <a:r>
+              <a:t>Doložení postupu: schopnost zdůvodnit volbu je stejně důležitá jako výsledek.</a:t>
+            </a:r>
+          </a:p>
+          <a:p/>
+          <a:p>
+            <a:r>
+              <a:t>POZOR</a:t>
+            </a:r>
+          </a:p>
+          <a:p>
+            <a:r>
+              <a:t>Hodnoť postup a zdůvodnění, ne shodu s jednou formulací. U závěrečného výstupu to platí dvojnásob — student s průměrným plakátem a přesným technickým listem umí víc než ten s efektním plakátem a prázdným listem.</a:t>
             </a:r>
           </a:p>
         </p:txBody>
@@ -1033,17 +1228,50 @@
           <a:lstStyle/>
           <a:p>
             <a:r>
-              <a:t>Exit ticket: Napiš tři vlastní zásady pro práci s grafikou, které si z tohoto bloku odnášíš.</a:t>
-            </a:r>
-          </a:p>
-          <a:p>
-            <a:r>
-              <a:t>Sbírej individuálně. Slouží jako doklad o učení každého studenta.</a:t>
-            </a:r>
-          </a:p>
-          <a:p>
-            <a:r>
-              <a:t>Očekávaná odpověď: Očekávají se konkrétní a použitelné zásady, ne obecné fráze.</a:t>
+              <a:t>Exit ticket, poslední dvě minuty. Zároveň poslední lístek celého bloku.</a:t>
+            </a:r>
+          </a:p>
+          <a:p/>
+          <a:p>
+            <a:r>
+              <a:t>CO ŘEKNEŠ</a:t>
+            </a:r>
+          </a:p>
+          <a:p>
+            <a:r>
+              <a:t>„Poslední úkol za osm hodin. Napište tři vlastní zásady pro práci s grafikou, které si odsud odnášíte. Vlastní znamená vaše, ne opsané ze snímku.“</a:t>
+            </a:r>
+          </a:p>
+          <a:p/>
+          <a:p>
+            <a:r>
+              <a:t>CO DĚLÁŠ</a:t>
+            </a:r>
+          </a:p>
+          <a:p>
+            <a:r>
+              <a:t>Sbírej u dveří a přečti si je. Je to nejlepší zpětná vazba, jakou k celému bloku dostaneš: co zaznělo osmkrát, to opravdu prošlo, a co nezazní vůbec, se příště musí učit jinak.</a:t>
+            </a:r>
+          </a:p>
+          <a:p>
+            <a:r>
+              <a:t>Stojí za to tři čtyři nejlepší zásady vyvěsit v učebně pro příští ročník.</a:t>
+            </a:r>
+          </a:p>
+          <a:p/>
+          <a:p>
+            <a:r>
+              <a:t>OČEKÁVANÁ ODPOVĚĎ</a:t>
+            </a:r>
+          </a:p>
+          <a:p>
+            <a:r>
+              <a:t>Konkrétní a použitelné zásady: „originál nikdy nepřepisuj“, „osa od nuly“, „co nefunguje v 16 px, není ikona“, „formát se vybírá podle obsahu, ne podle zvyku“.</a:t>
+            </a:r>
+          </a:p>
+          <a:p>
+            <a:r>
+              <a:t>Obecné fráze typu „grafika musí být hezká“ vrať s otázkou: podle čeho to poznáš?</a:t>
             </a:r>
           </a:p>
         </p:txBody>

--- a/public/materialy/1L/6/Prezentace k hodinám/8. Závěrečný výstup a obhajoba.pptx
+++ b/public/materialy/1L/6/Prezentace k hodinám/8. Závěrečný výstup a obhajoba.pptx
@@ -513,12 +513,12 @@
           </a:p>
           <a:p>
             <a:r>
-              <a:t>Zpřístupni nástroje z hodin 4, 5 a 7 — student si vybere sám podle varianty a nesmí na to narazit až v hodině.</a:t>
-            </a:r>
-          </a:p>
-          <a:p>
-            <a:r>
-              <a:t>Rozdej Závěrečný výstup.txt s rubrikou. Studenti ji musí mít před sebou od první minuty, protože se podle ní bude hodnotit.</a:t>
+              <a:t>Zpřístupni nástroje z hodin 4, 5 a 7 — student si vybere sám podle varianty a nesmí na to narazit až v hodině.</a:t>
+            </a:r>
+          </a:p>
+          <a:p>
+            <a:r>
+              <a:t>Rozdej Závěrečný výstup.txt s rubrikou. Studenti ji musí mít před sebou od první minuty, protože se podle ní bude hodnotit.</a:t>
             </a:r>
           </a:p>
           <a:p/>
@@ -529,12 +529,12 @@
           </a:p>
           <a:p>
             <a:r>
-              <a:t>Nic nového se neučí. Ty jsi tu jako konzultant, ne jako vykladač — obcházej a ptej se na důvody, neopravuj výsledky.</a:t>
-            </a:r>
-          </a:p>
-          <a:p>
-            <a:r>
-              <a:t>Počítej s tím, že 45 minut je málo. Když je to jen trochu možné, dej na závěrečný výstup dvě hodiny; obhajoby se pak vejdou v klidu.</a:t>
+              <a:t>Nic nového se neučí. Ty jsi tu jako konzultant, ne jako vykladač — obcházej a ptej se na důvody, neopravuj výsledky.</a:t>
+            </a:r>
+          </a:p>
+          <a:p>
+            <a:r>
+              <a:t>Počítej s tím, že 45 minut je málo. Když je to jen trochu možné, dej na závěrečný výstup dvě hodiny; obhajoby se pak vejdou v klidu.</a:t>
             </a:r>
           </a:p>
           <a:p/>
@@ -545,7 +545,7 @@
           </a:p>
           <a:p>
             <a:r>
-              <a:t>Student propojí dovednosti z celého bloku do jednoho výstupu, doloží svá rozhodnutí a obhájí je.</a:t>
+              <a:t>Student propojí dovednosti z celého bloku do jednoho výstupu, doloží svá rozhodnutí a obhájí je.</a:t>
             </a:r>
           </a:p>
           <a:p/>
@@ -556,7 +556,7 @@
           </a:p>
           <a:p>
             <a:r>
-              <a:t>Hotový výstup, vyplněný technický list a tři věty obhajoby.</a:t>
+              <a:t>Hotový výstup, vyplněný technický list a tři věty obhajoby.</a:t>
             </a:r>
           </a:p>
           <a:p/>
@@ -567,7 +567,7 @@
           </a:p>
           <a:p>
             <a:r>
-              <a:t>5 min volba a plán · 7 min kritéria · 22 min tvorba · 8 min obhajoby · 3 min shrnutí bloku.</a:t>
+              <a:t>5 min volba a plán · 7 min kritéria · 22 min tvorba · 8 min obhajoby · 3 min shrnutí bloku.</a:t>
             </a:r>
           </a:p>
         </p:txBody>
@@ -648,12 +648,12 @@
           </a:p>
           <a:p>
             <a:r>
-              <a:t>„Dneska nic nového. Vyberete si jednu ze tří variant a ukážete, co umíte. A než začnete: co na vašem výstupu pozná někdo, kdo neví nic o tom, jak vznikal?“</a:t>
-            </a:r>
-          </a:p>
-          <a:p>
-            <a:r>
-              <a:t>„Napište si plán. Co uděláte, v jakém nástroji a v jakém formátu to uložíte. Tři řádky stačí.“</a:t>
+              <a:t>„Dneska nic nového. Vyberete si jednu ze tří variant a ukážete, co umíte. A než začnete: co na vašem výstupu pozná někdo, kdo neví nic o tom, jak vznikal?“</a:t>
+            </a:r>
+          </a:p>
+          <a:p>
+            <a:r>
+              <a:t>„Napište si plán. Co uděláte, v jakém nástroji a v jakém formátu to uložíte. Tři řádky stačí.“</a:t>
             </a:r>
           </a:p>
           <a:p/>
@@ -664,12 +664,12 @@
           </a:p>
           <a:p>
             <a:r>
-              <a:t>Trvej na tom, aby plán vznikl dřív než první klik. Kdo začne dřív, skončí u výstupu bez formátu a bez zdůvodnění.</a:t>
-            </a:r>
-          </a:p>
-          <a:p>
-            <a:r>
-              <a:t>Ať si každý přečte rubriku ještě před začátkem. Většina bodů se ztrácí na technickém listu, ne na vzhledu, a to je potřeba vědět předem.</a:t>
+              <a:t>Trvej na tom, aby plán vznikl dřív než první klik. Kdo začne dřív, skončí u výstupu bez formátu a bez zdůvodnění.</a:t>
+            </a:r>
+          </a:p>
+          <a:p>
+            <a:r>
+              <a:t>Ať si každý přečte rubriku ještě před začátkem. Většina bodů se ztrácí na technickém listu, ne na vzhledu, a to je potřeba vědět předem.</a:t>
             </a:r>
           </a:p>
           <a:p/>
@@ -761,22 +761,22 @@
           </a:p>
           <a:p>
             <a:r>
-              <a:t>K bodu 01: „Rastr, vektor nebo sazba. Rozhoduje, co je uvnitř. Fotka rastrově, značka vektorově, plakát obojí dohromady — a to je normální kombinace, ne kompromis.“</a:t>
-            </a:r>
-          </a:p>
-          <a:p>
-            <a:r>
-              <a:t>K bodu 02: „Formát a rozlišení podle toho, kde to skončí. Na web něco jiného než do tiskárny. Tohle jsme dělali v hodinách 3 a 4 a teď se to bude počítat.“</a:t>
-            </a:r>
-          </a:p>
-          <a:p>
-            <a:r>
-              <a:t>K bodu 03: „A poslední: ke každému rozhodnutí patří důvod. Nestačí, že to tak je. Musíte umět říct proč.“</a:t>
-            </a:r>
-          </a:p>
-          <a:p>
-            <a:r>
-              <a:t>Závěr: „Hodnotí se výsledek, postup i zdůvodnění. Všechny tři.“</a:t>
+              <a:t>K bodu 01: „Rastr, vektor nebo sazba. Rozhoduje, co je uvnitř. Fotka rastrově, značka vektorově, plakát obojí dohromady — a to je normální kombinace, ne kompromis.“</a:t>
+            </a:r>
+          </a:p>
+          <a:p>
+            <a:r>
+              <a:t>K bodu 02: „Formát a rozlišení podle toho, kde to skončí. Na web něco jiného než do tiskárny. Tohle jsme dělali v hodinách 3 a 4 a teď se to bude počítat.“</a:t>
+            </a:r>
+          </a:p>
+          <a:p>
+            <a:r>
+              <a:t>K bodu 03: „A poslední: ke každému rozhodnutí patří důvod. Nestačí, že to tak je. Musíte umět říct proč.“</a:t>
+            </a:r>
+          </a:p>
+          <a:p>
+            <a:r>
+              <a:t>Závěr: „Hodnotí se výsledek, postup i zdůvodnění. Všechny tři.“</a:t>
             </a:r>
           </a:p>
           <a:p/>
@@ -787,7 +787,7 @@
           </a:p>
           <a:p>
             <a:r>
-              <a:t>Projdi rubriku bod po bodu a u každého řekni, jak vypadá plný počet bodů. Pět minut tady ušetří dvacet dohadování při hodnocení.</a:t>
+              <a:t>Projdi rubriku bod po bodu a u každého řekni, jak vypadá plný počet bodů. Pět minut tady ušetří dvacet dohadování při hodnocení.</a:t>
             </a:r>
           </a:p>
           <a:p/>
@@ -798,7 +798,7 @@
           </a:p>
           <a:p>
             <a:r>
-              <a:t>Nepředváděj nástroje znovu. Kdo je neovládá, doučí se to od spolužáka rychleji než z projekce.</a:t>
+              <a:t>Nepředváděj nástroje znovu. Kdo je neovládá, doučí se to od spolužáka rychleji než z projekce.</a:t>
             </a:r>
           </a:p>
         </p:txBody>
@@ -879,17 +879,17 @@
           </a:p>
           <a:p>
             <a:r>
-              <a:t>Obcházej a ptej se na důvody, ne na postup: „Proč PNG a ne JPEG?“ „Proč tenhle rozměr?“ Odpověď „nevím, přišlo mi to“ je signál, že se student má vrátit k technickému listu.</a:t>
-            </a:r>
-          </a:p>
-          <a:p>
-            <a:r>
-              <a:t>Technický list ať vyplňují průběžně, ne na konci. Rozměry a velikosti souborů se na konci hodiny nikomu dohledávat nechce a je to nejčastější ztráta bodů.</a:t>
-            </a:r>
-          </a:p>
-          <a:p>
-            <a:r>
-              <a:t>Ve 30. minutě řekni nahlas: „Za čtyři minuty končí tvorba. Kdo ještě nemá technický list, nechte výstup být a doplňte list.“</a:t>
+              <a:t>Obcházej a ptej se na důvody, ne na postup: „Proč PNG a ne JPEG?“ „Proč tenhle rozměr?“ Odpověď „nevím, přišlo mi to“ je signál, že se student má vrátit k technickému listu.</a:t>
+            </a:r>
+          </a:p>
+          <a:p>
+            <a:r>
+              <a:t>Technický list ať vyplňují průběžně, ne na konci. Rozměry a velikosti souborů se na konci hodiny nikomu dohledávat nechce a je to nejčastější ztráta bodů.</a:t>
+            </a:r>
+          </a:p>
+          <a:p>
+            <a:r>
+              <a:t>Ve 30. minutě řekni nahlas: „Za čtyři minuty končí tvorba. Kdo ještě nemá technický list, nechte výstup být a doplňte list.“</a:t>
             </a:r>
           </a:p>
           <a:p/>
@@ -900,7 +900,7 @@
           </a:p>
           <a:p>
             <a:r>
-              <a:t>Šedesát sekund na studenta a měř to. Tři věty: co jsem zvolil, proč, co bych udělal jinak.</a:t>
+              <a:t>Šedesát sekund na studenta a měř to. Tři věty: co jsem zvolil, proč, co bych udělal jinak.</a:t>
             </a:r>
           </a:p>
           <a:p>
@@ -910,7 +910,7 @@
           </a:p>
           <a:p>
             <a:r>
-              <a:t>Neptej se po každé obhajobě třídy na názor, nezbyde čas. Řekni jednu větu ty a jdi dál.</a:t>
+              <a:t>Neptej se po každé obhajobě třídy na názor, nezbyde čas. Řekni jednu větu ty a jdi dál.</a:t>
             </a:r>
           </a:p>
           <a:p/>
@@ -921,7 +921,7 @@
           </a:p>
           <a:p>
             <a:r>
-              <a:t>Vrať se k první hodině: „Začínali jsme otázkou, jaký soubor si vyžádáte od grafika na logo na plachtu. Kdo by to dneska zdůvodnil jinak?“</a:t>
+              <a:t>Vrať se k první hodině: „Začínali jsme otázkou, jaký soubor si vyžádáte od grafika na logo na plachtu. Kdo by to dneska zdůvodnil jinak?“</a:t>
             </a:r>
           </a:p>
           <a:p/>
@@ -932,7 +932,7 @@
           </a:p>
           <a:p>
             <a:r>
-              <a:t>Hotový výstup, vyplněný technický list a tři věty obhajoby.</a:t>
+              <a:t>Hotový výstup, vyplněný technický list a tři věty obhajoby.</a:t>
             </a:r>
           </a:p>
         </p:txBody>
@@ -1002,7 +1002,7 @@
           <a:lstStyle/>
           <a:p>
             <a:r>
-              <a:t>Průběžná kontrola, zhruba 32. minuta — dřív než v ostatních hodinách, ať zbude čas na obhajoby.</a:t>
+              <a:t>Průběžná kontrola, zhruba 32. minuta — dřív než v ostatních hodinách, ať zbude čas na obhajoby.</a:t>
             </a:r>
           </a:p>
           <a:p/>
@@ -1013,7 +1013,7 @@
           </a:p>
           <a:p>
             <a:r>
-              <a:t>„Než odevzdáte, projedeme čtyři věci. Odškrtávejte si je.“ Čti body nahlas a mezi nimi nech pauzu.</a:t>
+              <a:t>„Než odevzdáte, projedeme čtyři věci. Odškrtávejte si je.“ Čti body nahlas a mezi nimi nech pauzu.</a:t>
             </a:r>
           </a:p>
           <a:p/>
@@ -1024,7 +1024,7 @@
           </a:p>
           <a:p>
             <a:r>
-              <a:t>Druhý a třetí bod jsou ty, kde se ztrácí nejvíc bodů. Řekni to nahlas — je fér, aby to věděli, než odevzdají.</a:t>
+              <a:t>Druhý a třetí bod jsou ty, kde se ztrácí nejvíc bodů. Řekni to nahlas — je fér, aby to věděli, než odevzdají.</a:t>
             </a:r>
           </a:p>
           <a:p/>
@@ -1116,12 +1116,12 @@
           </a:p>
           <a:p>
             <a:r>
-              <a:t>„Osm hodin zpátky jsme začali otázkou, jaký soubor si vyžádáte od grafika na logo, které jde na vizitku i na plachtu. Kdo by to dneska zdůvodnil jinak než tehdy?“</a:t>
-            </a:r>
-          </a:p>
-          <a:p>
-            <a:r>
-              <a:t>Pak nech studenty vyslovit čtyři závěry ze snímku a doplň jen to, co nezazní.</a:t>
+              <a:t>„Osm hodin zpátky jsme začali otázkou, jaký soubor si vyžádáte od grafika na logo, které jde na vizitku i na plachtu. Kdo by to dneska zdůvodnil jinak než tehdy?“</a:t>
+            </a:r>
+          </a:p>
+          <a:p>
+            <a:r>
+              <a:t>Pak nech studenty vyslovit čtyři závěry ze snímku a doplň jen to, co nezazní.</a:t>
             </a:r>
           </a:p>
           <a:p/>
@@ -1132,17 +1132,17 @@
           </a:p>
           <a:p>
             <a:r>
-              <a:t>Formát a účel: volba formátu vychází z toho, kde bude výstup použit.</a:t>
-            </a:r>
-          </a:p>
-          <a:p>
-            <a:r>
-              <a:t>Rastr a vektor: značka vektorově, fotografie rastrově, kombinace je běžná.</a:t>
-            </a:r>
-          </a:p>
-          <a:p>
-            <a:r>
-              <a:t>Poctivost dat: pokud výstup obsahuje čísla, patří k nim zdroj a omezení.</a:t>
+              <a:t>Formát a účel: volba formátu vychází z toho, kde bude výstup použit.</a:t>
+            </a:r>
+          </a:p>
+          <a:p>
+            <a:r>
+              <a:t>Rastr a vektor: značka vektorově, fotografie rastrově, kombinace je běžná.</a:t>
+            </a:r>
+          </a:p>
+          <a:p>
+            <a:r>
+              <a:t>Poctivost dat: pokud výstup obsahuje čísla, patří k nim zdroj a omezení.</a:t>
             </a:r>
           </a:p>
           <a:p>
@@ -1158,7 +1158,7 @@
           </a:p>
           <a:p>
             <a:r>
-              <a:t>Hodnoť postup a zdůvodnění, ne shodu s jednou formulací. U závěrečného výstupu to platí dvojnásob — student s průměrným plakátem a přesným technickým listem umí víc než ten s efektním plakátem a prázdným listem.</a:t>
+              <a:t>Hodnoť postup a zdůvodnění, ne shodu s jednou formulací. U závěrečného výstupu to platí dvojnásob — student s průměrným plakátem a přesným technickým listem umí víc než ten s efektním plakátem a prázdným listem.</a:t>
             </a:r>
           </a:p>
         </p:txBody>
@@ -1239,7 +1239,7 @@
           </a:p>
           <a:p>
             <a:r>
-              <a:t>„Poslední úkol za osm hodin. Napište tři vlastní zásady pro práci s grafikou, které si odsud odnášíte. Vlastní znamená vaše, ne opsané ze snímku.“</a:t>
+              <a:t>„Poslední úkol za osm hodin. Napište tři vlastní zásady pro práci s grafikou, které si odsud odnášíte. Vlastní znamená vaše, ne opsané ze snímku.“</a:t>
             </a:r>
           </a:p>
           <a:p/>
@@ -1250,12 +1250,12 @@
           </a:p>
           <a:p>
             <a:r>
-              <a:t>Sbírej u dveří a přečti si je. Je to nejlepší zpětná vazba, jakou k celému bloku dostaneš: co zaznělo osmkrát, to opravdu prošlo, a co nezazní vůbec, se příště musí učit jinak.</a:t>
-            </a:r>
-          </a:p>
-          <a:p>
-            <a:r>
-              <a:t>Stojí za to tři čtyři nejlepší zásady vyvěsit v učebně pro příští ročník.</a:t>
+              <a:t>Sbírej u dveří a přečti si je. Je to nejlepší zpětná vazba, jakou k celému bloku dostaneš: co zaznělo osmkrát, to opravdu prošlo, a co nezazní vůbec, se příště musí učit jinak.</a:t>
+            </a:r>
+          </a:p>
+          <a:p>
+            <a:r>
+              <a:t>Stojí za to tři čtyři nejlepší zásady vyvěsit v učebně pro příští ročník.</a:t>
             </a:r>
           </a:p>
           <a:p/>
@@ -1266,12 +1266,12 @@
           </a:p>
           <a:p>
             <a:r>
-              <a:t>Konkrétní a použitelné zásady: „originál nikdy nepřepisuj“, „osa od nuly“, „co nefunguje v 16 px, není ikona“, „formát se vybírá podle obsahu, ne podle zvyku“.</a:t>
-            </a:r>
-          </a:p>
-          <a:p>
-            <a:r>
-              <a:t>Obecné fráze typu „grafika musí být hezká“ vrať s otázkou: podle čeho to poznáš?</a:t>
+              <a:t>Konkrétní a použitelné zásady: „originál nikdy nepřepisuj“, „osa od nuly“, „co nefunguje v 16 px, není ikona“, „formát se vybírá podle obsahu, ne podle zvyku“.</a:t>
+            </a:r>
+          </a:p>
+          <a:p>
+            <a:r>
+              <a:t>Obecné fráze typu „grafika musí být hezká“ vrať s otázkou: podle čeho to poznáš?</a:t>
             </a:r>
           </a:p>
         </p:txBody>
@@ -4469,7 +4469,7 @@
                 </a:solidFill>
                 <a:latin typeface="Calibri"/>
               </a:rPr>
-              <a:t>Závěrečný výstup a obhajoba</a:t>
+              <a:t>Závěrečný výstup a obhajoba</a:t>
             </a:r>
           </a:p>
         </p:txBody>
@@ -4508,7 +4508,7 @@
                 </a:solidFill>
                 <a:latin typeface="Calibri"/>
               </a:rPr>
-              <a:t>Student propojí dovednosti z celého bloku do jednoho výstupu, doloží svá rozhodnutí a obhájí je.</a:t>
+              <a:t>Student propojí dovednosti z celého bloku do jednoho výstupu, doloží svá rozhodnutí a obhájí je.</a:t>
             </a:r>
           </a:p>
         </p:txBody>
@@ -4833,7 +4833,7 @@
                 </a:solidFill>
                 <a:latin typeface="Calibri"/>
               </a:rPr>
-              <a:t>POČÍTAČOVÁ GRAFIKA A PRÁCE S MULTIMÉDII</a:t>
+              <a:t>POČÍTAČOVÁ GRAFIKA A PRÁCE S MULTIMÉDII</a:t>
             </a:r>
           </a:p>
         </p:txBody>
@@ -4907,7 +4907,7 @@
                 </a:solidFill>
                 <a:latin typeface="Calibri"/>
               </a:rPr>
-              <a:t>Co na tvém výstupu pozná někdo, kdo neví nic o tom, jak vznikal?</a:t>
+              <a:t>Co na tvém výstupu pozná někdo, kdo neví nic o tom, jak vznikal?</a:t>
             </a:r>
           </a:p>
         </p:txBody>
@@ -4981,7 +4981,7 @@
                 </a:solidFill>
                 <a:latin typeface="Calibri"/>
               </a:rPr>
-              <a:t>A plakát, B značka a karta, nebo C infografika.</a:t>
+              <a:t>A plakát, B značka a karta, nebo C infografika.</a:t>
             </a:r>
           </a:p>
         </p:txBody>
@@ -5055,7 +5055,7 @@
                 </a:solidFill>
                 <a:latin typeface="Calibri"/>
               </a:rPr>
-              <a:t>Napiš, co uděláš v jakém nástroji a v jakém formátu uložíš.</a:t>
+              <a:t>Napiš, co uděláš v jakém nástroji a v jakém formátu uložíš.</a:t>
             </a:r>
           </a:p>
         </p:txBody>
@@ -5375,7 +5375,7 @@
                 </a:solidFill>
                 <a:latin typeface="Calibri"/>
               </a:rPr>
-              <a:t>POČÍTAČOVÁ GRAFIKA A PRÁCE S MULTIMÉDII</a:t>
+              <a:t>POČÍTAČOVÁ GRAFIKA A PRÁCE S MULTIMÉDII</a:t>
             </a:r>
           </a:p>
         </p:txBody>
@@ -5716,7 +5716,7 @@
                 </a:solidFill>
                 <a:latin typeface="Calibri"/>
               </a:rPr>
-              <a:t>Formát a rozlišení podle toho, kde bude výstup zveřejněn.</a:t>
+              <a:t>Formát a rozlišení podle toho, kde bude výstup zveřejněn.</a:t>
             </a:r>
           </a:p>
         </p:txBody>
@@ -5948,7 +5948,7 @@
                 </a:solidFill>
                 <a:latin typeface="Calibri"/>
               </a:rPr>
-              <a:t>Hodnotí se výsledek, postup i zdůvodnění.</a:t>
+              <a:t>Hodnotí se výsledek, postup i zdůvodnění.</a:t>
             </a:r>
           </a:p>
         </p:txBody>
@@ -6159,7 +6159,7 @@
                 </a:solidFill>
                 <a:latin typeface="Calibri"/>
               </a:rPr>
-              <a:t>POČÍTAČOVÁ GRAFIKA A PRÁCE S MULTIMÉDII</a:t>
+              <a:t>POČÍTAČOVÁ GRAFIKA A PRÁCE S MULTIMÉDII</a:t>
             </a:r>
           </a:p>
         </p:txBody>
@@ -6264,7 +6264,7 @@
                 </a:solidFill>
                 <a:latin typeface="Calibri"/>
               </a:rPr>
-              <a:t>Závěrečný výstup.txt, nástroje z hodin 4, 5 a 7</a:t>
+              <a:t>Závěrečný výstup.txt, nástroje z hodin 4, 5 a 7</a:t>
             </a:r>
           </a:p>
         </p:txBody>
@@ -6373,7 +6373,7 @@
                 </a:solidFill>
                 <a:latin typeface="Calibri"/>
               </a:rPr>
-              <a:t>Zpracuj vybranou variantu podle povinných prvků v zadání.</a:t>
+              <a:t>Zpracuj vybranou variantu podle povinných prvků v zadání.</a:t>
             </a:r>
           </a:p>
         </p:txBody>
@@ -6482,7 +6482,7 @@
                 </a:solidFill>
                 <a:latin typeface="Calibri"/>
               </a:rPr>
-              <a:t>Zapiš rozměry, formáty, velikosti souborů a použité nástroje.</a:t>
+              <a:t>Zapiš rozměry, formáty, velikosti souborů a použité nástroje.</a:t>
             </a:r>
           </a:p>
         </p:txBody>
@@ -6591,7 +6591,7 @@
                 </a:solidFill>
                 <a:latin typeface="Calibri"/>
               </a:rPr>
-              <a:t>Připrav tři věty: co jsi zvolil, proč a co bys udělal jinak.</a:t>
+              <a:t>Připrav tři věty: co jsi zvolil, proč a co bys udělal jinak.</a:t>
             </a:r>
           </a:p>
         </p:txBody>
@@ -6705,7 +6705,7 @@
                 </a:solidFill>
                 <a:latin typeface="Calibri"/>
               </a:rPr>
-              <a:t>Hotový výstup, vyplněný technický list a tři věty obhajoby.</a:t>
+              <a:t>Hotový výstup, vyplněný technický list a tři věty obhajoby.</a:t>
             </a:r>
           </a:p>
         </p:txBody>
@@ -6916,7 +6916,7 @@
                 </a:solidFill>
                 <a:latin typeface="Calibri"/>
               </a:rPr>
-              <a:t>POČÍTAČOVÁ GRAFIKA A PRÁCE S MULTIMÉDII</a:t>
+              <a:t>POČÍTAČOVÁ GRAFIKA A PRÁCE S MULTIMÉDII</a:t>
             </a:r>
           </a:p>
         </p:txBody>
@@ -7099,7 +7099,7 @@
                 </a:solidFill>
                 <a:latin typeface="Calibri"/>
               </a:rPr>
-              <a:t>Technický list obsahuje rozměry, formáty i velikosti.</a:t>
+              <a:t>Technický list obsahuje rozměry, formáty i velikosti.</a:t>
             </a:r>
           </a:p>
         </p:txBody>
@@ -7173,7 +7173,7 @@
                 </a:solidFill>
                 <a:latin typeface="Calibri"/>
               </a:rPr>
-              <a:t>U volby formátu máš uvedený důvod.</a:t>
+              <a:t>U volby formátu máš uvedený důvod.</a:t>
             </a:r>
           </a:p>
         </p:txBody>
@@ -7379,7 +7379,7 @@
                 </a:solidFill>
                 <a:latin typeface="Calibri"/>
               </a:rPr>
-              <a:t>Co si z hodiny odnést</a:t>
+              <a:t>Co si z hodiny odnést</a:t>
             </a:r>
           </a:p>
         </p:txBody>
@@ -7458,7 +7458,7 @@
                 </a:solidFill>
                 <a:latin typeface="Calibri"/>
               </a:rPr>
-              <a:t>POČÍTAČOVÁ GRAFIKA A PRÁCE S MULTIMÉDII</a:t>
+              <a:t>POČÍTAČOVÁ GRAFIKA A PRÁCE S MULTIMÉDII</a:t>
             </a:r>
           </a:p>
         </p:txBody>
@@ -7528,7 +7528,7 @@
                 </a:solidFill>
                 <a:latin typeface="Calibri"/>
               </a:rPr>
-              <a:t>Formát a účel</a:t>
+              <a:t>Formát a účel</a:t>
             </a:r>
           </a:p>
         </p:txBody>
@@ -7567,7 +7567,7 @@
                 </a:solidFill>
                 <a:latin typeface="Calibri"/>
               </a:rPr>
-              <a:t>Volba formátu vychází z toho, kde bude výstup použit.</a:t>
+              <a:t>Volba formátu vychází z toho, kde bude výstup použit.</a:t>
             </a:r>
           </a:p>
         </p:txBody>
@@ -7646,7 +7646,7 @@
                 </a:solidFill>
                 <a:latin typeface="Calibri"/>
               </a:rPr>
-              <a:t>Rastr a vektor</a:t>
+              <a:t>Rastr a vektor</a:t>
             </a:r>
           </a:p>
         </p:txBody>
@@ -7803,7 +7803,7 @@
                 </a:solidFill>
                 <a:latin typeface="Calibri"/>
               </a:rPr>
-              <a:t>Pokud výstup obsahuje čísla, patří k nim zdroj a omezení.</a:t>
+              <a:t>Pokud výstup obsahuje čísla, patří k nim zdroj a omezení.</a:t>
             </a:r>
           </a:p>
         </p:txBody>
@@ -8062,7 +8062,7 @@
                 </a:solidFill>
                 <a:latin typeface="Calibri"/>
               </a:rPr>
-              <a:t>POČÍTAČOVÁ GRAFIKA A PRÁCE S MULTIMÉDII</a:t>
+              <a:t>POČÍTAČOVÁ GRAFIKA A PRÁCE S MULTIMÉDII</a:t>
             </a:r>
           </a:p>
         </p:txBody>
@@ -8171,7 +8171,7 @@
                 </a:solidFill>
                 <a:latin typeface="Calibri"/>
               </a:rPr>
-              <a:t>Napiš tři vlastní zásady pro práci s grafikou, které si z tohoto bloku odnášíš.</a:t>
+              <a:t>Napiš tři vlastní zásady pro práci s grafikou, které si z tohoto bloku odnášíš.</a:t>
             </a:r>
           </a:p>
         </p:txBody>
@@ -8285,7 +8285,7 @@
                 </a:solidFill>
                 <a:latin typeface="Calibri"/>
               </a:rPr>
-              <a:t>Očekávají se konkrétní a použitelné zásady, ne obecné fráze.</a:t>
+              <a:t>Očekávají se konkrétní a použitelné zásady, ne obecné fráze.</a:t>
             </a:r>
           </a:p>
         </p:txBody>
